--- a/media/exports/reports/2026-08/calls.pptx
+++ b/media/exports/reports/2026-08/calls.pptx
@@ -235,25 +235,25 @@
                 <c:formatCode>#,##0;[Red](#,##0)</c:formatCode>
                 <c:ptCount val="7"/>
                 <c:pt idx="0">
-                  <c:v>91</c:v>
+                  <c:v>94</c:v>
                 </c:pt>
                 <c:pt idx="1">
-                  <c:v>203</c:v>
+                  <c:v>192</c:v>
                 </c:pt>
                 <c:pt idx="2">
-                  <c:v>147</c:v>
+                  <c:v>138</c:v>
                 </c:pt>
                 <c:pt idx="3">
-                  <c:v>114</c:v>
+                  <c:v>113</c:v>
                 </c:pt>
                 <c:pt idx="4">
+                  <c:v>126</c:v>
+                </c:pt>
+                <c:pt idx="5">
                   <c:v>127</c:v>
                 </c:pt>
-                <c:pt idx="5">
-                  <c:v>121</c:v>
-                </c:pt>
                 <c:pt idx="6">
-                  <c:v>163</c:v>
+                  <c:v>152</c:v>
                 </c:pt>
               </c:numCache>
             </c:numRef>
@@ -317,7 +317,7 @@
       <c:valAx>
         <c:axId val="-2113994440"/>
         <c:scaling>
-          <c:max val="233.45"/>
+          <c:max val="220.79999999999998"/>
           <c:min val="0.0"/>
         </c:scaling>
         <c:delete/>
@@ -480,73 +480,73 @@
                 <c:formatCode>#,##0;[Red](#,##0)</c:formatCode>
                 <c:ptCount val="23"/>
                 <c:pt idx="0">
-                  <c:v>659</c:v>
+                  <c:v>685</c:v>
                 </c:pt>
                 <c:pt idx="1">
-                  <c:v>655</c:v>
+                  <c:v>633</c:v>
                 </c:pt>
                 <c:pt idx="2">
+                  <c:v>684</c:v>
+                </c:pt>
+                <c:pt idx="3">
+                  <c:v>690</c:v>
+                </c:pt>
+                <c:pt idx="4">
+                  <c:v>664</c:v>
+                </c:pt>
+                <c:pt idx="5">
                   <c:v>685</c:v>
                 </c:pt>
-                <c:pt idx="3">
-                  <c:v>714</c:v>
-                </c:pt>
-                <c:pt idx="4">
-                  <c:v>683</c:v>
-                </c:pt>
-                <c:pt idx="5">
-                  <c:v>725</c:v>
-                </c:pt>
                 <c:pt idx="6">
-                  <c:v>620</c:v>
+                  <c:v>629</c:v>
                 </c:pt>
                 <c:pt idx="7">
-                  <c:v>754</c:v>
+                  <c:v>724</c:v>
                 </c:pt>
                 <c:pt idx="8">
-                  <c:v>783</c:v>
+                  <c:v>820</c:v>
                 </c:pt>
                 <c:pt idx="9">
-                  <c:v>871</c:v>
+                  <c:v>909</c:v>
                 </c:pt>
                 <c:pt idx="10">
-                  <c:v>852</c:v>
+                  <c:v>826</c:v>
                 </c:pt>
                 <c:pt idx="11">
-                  <c:v>781</c:v>
+                  <c:v>756</c:v>
                 </c:pt>
                 <c:pt idx="12">
-                  <c:v>792</c:v>
+                  <c:v>770</c:v>
                 </c:pt>
                 <c:pt idx="13">
-                  <c:v>675</c:v>
+                  <c:v>746</c:v>
                 </c:pt>
                 <c:pt idx="14">
-                  <c:v>725</c:v>
+                  <c:v>776</c:v>
                 </c:pt>
                 <c:pt idx="15">
-                  <c:v>756</c:v>
+                  <c:v>726</c:v>
                 </c:pt>
                 <c:pt idx="16">
-                  <c:v>763</c:v>
+                  <c:v>678</c:v>
                 </c:pt>
                 <c:pt idx="17">
-                  <c:v>774</c:v>
+                  <c:v>865</c:v>
                 </c:pt>
                 <c:pt idx="18">
-                  <c:v>751</c:v>
+                  <c:v>731</c:v>
                 </c:pt>
                 <c:pt idx="19">
-                  <c:v>781</c:v>
+                  <c:v>757</c:v>
                 </c:pt>
                 <c:pt idx="20">
-                  <c:v>974</c:v>
+                  <c:v>951</c:v>
                 </c:pt>
                 <c:pt idx="21">
-                  <c:v>941</c:v>
+                  <c:v>953</c:v>
                 </c:pt>
                 <c:pt idx="22">
-                  <c:v>966</c:v>
+                  <c:v>942</c:v>
                 </c:pt>
               </c:numCache>
             </c:numRef>
@@ -595,7 +595,7 @@
         <c:axId val="-2100718248"/>
         <c:scaling>
           <c:orientation val="minMax"/>
-          <c:max val="1200.0"/>
+          <c:max val="1000.0"/>
           <c:min val="0.0"/>
         </c:scaling>
         <c:delete val="0"/>
@@ -1120,7 +1120,7 @@
           <a:lstStyle/>
           <a:p>
             <a:r>
-              <a:t>When do calls for help come in, and are we there to answer?. Calls for help, August: 966; Answered while staffed, August: 79.2%; Calls outside staffed hours, August: 54.8%; Median wait when answered, August: 84 sec. 966 calls for help came in during August. While the line was staffed, 79.2% were answered (target 90.0%); 54.8% of all calls came outside staffed hours and went to voicemail. The busiest time was 5 to 8pm (203 calls). 203 calls came between 5 and 8pm, when no-one is on the line. 91 callers hung up waiting while the line was staffed.</a:t>
+              <a:t>When do calls for help come in, and are we there to answer?. Calls for help, August: 942; Answered while staffed, August: 77.7%; Calls outside staffed hours, August: 55.3%; Median wait when answered, August: 80 sec. 942 calls for help came in during August. While the line was staffed, 77.7% were answered (target 90.0%); 55.3% of all calls came outside staffed hours and went to voicemail. The busiest time was 5 to 8pm (192 calls). 192 calls came between 5 and 8pm, when no-one is on the line. 94 callers hung up waiting while the line was staffed.</a:t>
             </a:r>
           </a:p>
         </p:txBody>
@@ -4605,7 +4605,7 @@
                 </a:solidFill>
                 <a:latin typeface="Roboto"/>
               </a:rPr>
-              <a:t>Data retrieved 2pm, Tue 6 Oct 2026 · Generated 8 Oct 2026, 6:42pm · Sample data · Made with Python (python-pptx)</a:t>
+              <a:t>Data retrieved 2pm, Tue 6 Oct 2026 · Generated 8 Oct 2026, 11:41pm · Sample data · Made with Python (python-pptx)</a:t>
             </a:r>
           </a:p>
         </p:txBody>
@@ -4951,7 +4951,7 @@
                 </a:solidFill>
                 <a:latin typeface="Roboto"/>
               </a:rPr>
-              <a:t>966</a:t>
+              <a:t>942</a:t>
             </a:r>
           </a:p>
         </p:txBody>
@@ -4990,7 +4990,7 @@
                 </a:solidFill>
                 <a:latin typeface="Roboto"/>
               </a:rPr>
-              <a:t>July 941</a:t>
+              <a:t>July 953</a:t>
             </a:r>
           </a:p>
         </p:txBody>
@@ -5117,7 +5117,7 @@
                 </a:solidFill>
                 <a:latin typeface="Roboto"/>
               </a:rPr>
-              <a:t>79.2%</a:t>
+              <a:t>77.7%</a:t>
             </a:r>
           </a:p>
         </p:txBody>
@@ -5283,7 +5283,7 @@
                 </a:solidFill>
                 <a:latin typeface="Roboto"/>
               </a:rPr>
-              <a:t>54.8%</a:t>
+              <a:t>55.3%</a:t>
             </a:r>
           </a:p>
         </p:txBody>
@@ -5322,7 +5322,7 @@
                 </a:solidFill>
                 <a:latin typeface="Roboto"/>
               </a:rPr>
-              <a:t>529 calls to voicemail</a:t>
+              <a:t>521 calls to voicemail</a:t>
             </a:r>
           </a:p>
         </p:txBody>
@@ -5449,7 +5449,7 @@
                 </a:solidFill>
                 <a:latin typeface="Roboto"/>
               </a:rPr>
-              <a:t>84 sec</a:t>
+              <a:t>80 sec</a:t>
             </a:r>
           </a:p>
         </p:txBody>
@@ -5488,7 +5488,7 @@
                 </a:solidFill>
                 <a:latin typeface="Roboto"/>
               </a:rPr>
-              <a:t>346 answered calls</a:t>
+              <a:t>327 answered calls</a:t>
             </a:r>
           </a:p>
         </p:txBody>
@@ -5633,7 +5633,7 @@
                 </a:solidFill>
                 <a:latin typeface="Roboto"/>
               </a:rPr>
-              <a:t>966 calls for help came in during August. While the line was staffed, 79.2% were answered (target 90.0%); 54.8% of all calls came outside staffed hours and went to voicemail. The busiest time was 5 to 8pm (203 calls).</a:t>
+              <a:t>942 calls for help came in during August. While the line was staffed, 77.7% were answered (target 90.0%); 55.3% of all calls came outside staffed hours and went to voicemail. The busiest time was 5 to 8pm (192 calls).</a:t>
             </a:r>
           </a:p>
         </p:txBody>
@@ -5760,7 +5760,7 @@
                 </a:solidFill>
                 <a:latin typeface="Roboto"/>
               </a:rPr>
-              <a:t>203 calls came between 5 and 8pm, when no-one is on the line. 91 callers hung up waiting while the line was staffed.</a:t>
+              <a:t>192 calls came between 5 and 8pm, when no-one is on the line. 94 callers hung up waiting while the line was staffed.</a:t>
             </a:r>
           </a:p>
         </p:txBody>
@@ -5838,7 +5838,7 @@
                 </a:solidFill>
                 <a:latin typeface="Roboto"/>
               </a:rPr>
-              <a:t>Data retrieved 2pm, Tue 6 Oct 2026 · Generated 8 Oct 2026, 6:42pm · Sample data · Made with Python (python-pptx)</a:t>
+              <a:t>Data retrieved 2pm, Tue 6 Oct 2026 · Generated 8 Oct 2026, 11:41pm · Sample data · Made with Python (python-pptx)</a:t>
             </a:r>
           </a:p>
         </p:txBody>
@@ -6153,7 +6153,7 @@
                 </a:solidFill>
                 <a:latin typeface="Roboto"/>
               </a:rPr>
-              <a:t>Data retrieved 2pm, Tue 6 Oct 2026 · Generated 8 Oct 2026, 6:42pm · Sample data · Made with Python (python-pptx)</a:t>
+              <a:t>Data retrieved 2pm, Tue 6 Oct 2026 · Generated 8 Oct 2026, 11:41pm · Sample data · Made with Python (python-pptx)</a:t>
             </a:r>
           </a:p>
         </p:txBody>

--- a/media/exports/reports/2026-08/calls.pptx
+++ b/media/exports/reports/2026-08/calls.pptx
@@ -1050,7 +1050,7 @@
           <a:lstStyle/>
           <a:p>
             <a:r>
-              <a:t>When do calls for help come in, and are we there to answer?. Sample Community Services Ltd. Period: August 2026. Every call to the help line: when it came in, whether someone answered, and how long the caller waited. The line is staffed 8:30am to 5pm on working days.</a:t>
+              <a:t>When do calls for help come in, and are we there to answer?. Sample Community Services Ltd. Period: August 2026. In short: 942 calls in August: 77.7% answered while staffed (target 90.0%); 55.3% came outside staffed hours. Every call to the help line: when it came in, whether someone answered, and how long the caller waited. The line is staffed 8:30am to 5pm on working days.</a:t>
             </a:r>
           </a:p>
         </p:txBody>
@@ -4415,7 +4415,7 @@
         <p:spPr>
           <a:xfrm>
             <a:off x="457200" y="3703320"/>
-            <a:ext cx="11277295" cy="535940"/>
+            <a:ext cx="11277295" cy="758190"/>
           </a:xfrm>
           <a:prstGeom prst="rect">
             <a:avLst/>
@@ -4440,7 +4440,7 @@
                 </a:solidFill>
                 <a:latin typeface="Roboto"/>
               </a:rPr>
-              <a:t>Period: August 2026. Every call to the help line: when it came in, whether someone answered, and how long the caller waited. The line is staffed 8:30am to 5pm on working days.</a:t>
+              <a:t>Period: August 2026. In short: 942 calls in August: 77.7% answered while staffed (target 90.0%); 55.3% came outside staffed hours. Every call to the help line: when it came in, whether someone answered, and how long the caller waited. The line is staffed 8:30am to 5pm on working days.</a:t>
             </a:r>
           </a:p>
         </p:txBody>
@@ -4453,7 +4453,7 @@
         </p:nvSpPr>
         <p:spPr>
           <a:xfrm>
-            <a:off x="457200" y="4330700"/>
+            <a:off x="457200" y="4552950"/>
             <a:ext cx="11277295" cy="1097280"/>
           </a:xfrm>
           <a:prstGeom prst="rect">
@@ -4605,7 +4605,7 @@
                 </a:solidFill>
                 <a:latin typeface="Roboto"/>
               </a:rPr>
-              <a:t>Data retrieved 2pm, Tue 6 Oct 2026 · Generated 8 Oct 2026, 11:41pm · Sample data · Made with Python (python-pptx)</a:t>
+              <a:t>Data retrieved 2pm, Tue 6 Oct 2026 · Generated 10 Oct 2026, 9:55pm · Sample data · Made with Python (python-pptx)</a:t>
             </a:r>
           </a:p>
         </p:txBody>
@@ -5838,7 +5838,7 @@
                 </a:solidFill>
                 <a:latin typeface="Roboto"/>
               </a:rPr>
-              <a:t>Data retrieved 2pm, Tue 6 Oct 2026 · Generated 8 Oct 2026, 11:41pm · Sample data · Made with Python (python-pptx)</a:t>
+              <a:t>Data retrieved 2pm, Tue 6 Oct 2026 · Generated 10 Oct 2026, 9:55pm · Sample data · Made with Python (python-pptx)</a:t>
             </a:r>
           </a:p>
         </p:txBody>
@@ -6153,7 +6153,7 @@
                 </a:solidFill>
                 <a:latin typeface="Roboto"/>
               </a:rPr>
-              <a:t>Data retrieved 2pm, Tue 6 Oct 2026 · Generated 8 Oct 2026, 11:41pm · Sample data · Made with Python (python-pptx)</a:t>
+              <a:t>Data retrieved 2pm, Tue 6 Oct 2026 · Generated 10 Oct 2026, 9:55pm · Sample data · Made with Python (python-pptx)</a:t>
             </a:r>
           </a:p>
         </p:txBody>
